--- a/docs/World_Model_Brake_System_12min_3speakers.pptx
+++ b/docs/World_Model_Brake_System_12min_3speakers.pptx
@@ -11865,7 +11865,7 @@
         <p:spPr>
           <a:xfrm>
             <a:off x="0" y="0"/>
-            <a:ext cx="12191695" cy="6858000"/>
+            <a:ext cx="12192000" cy="713740"/>
           </a:xfrm>
           <a:prstGeom prst="rect">
             <a:avLst/>
